--- a/Part 2 Lectures/1_LTSM_in_action.pptx
+++ b/Part 2 Lectures/1_LTSM_in_action.pptx
@@ -160,6 +160,77 @@
       </pc:sldChg>
     </pc:docChg>
   </pc:docChgLst>
+  <pc:docChgLst>
+    <pc:chgData name="Israel Trejo" userId="94abe8331a44785d" providerId="LiveId" clId="{C64EC362-DB82-4CB5-B399-A3CE20D8262C}"/>
+    <pc:docChg chg="undo custSel modSld">
+      <pc:chgData name="Israel Trejo" userId="94abe8331a44785d" providerId="LiveId" clId="{C64EC362-DB82-4CB5-B399-A3CE20D8262C}" dt="2025-10-21T15:39:12.203" v="16" actId="1076"/>
+      <pc:docMkLst>
+        <pc:docMk/>
+      </pc:docMkLst>
+      <pc:sldChg chg="modSp mod">
+        <pc:chgData name="Israel Trejo" userId="94abe8331a44785d" providerId="LiveId" clId="{C64EC362-DB82-4CB5-B399-A3CE20D8262C}" dt="2025-10-21T05:43:18.584" v="1" actId="14100"/>
+        <pc:sldMkLst>
+          <pc:docMk/>
+          <pc:sldMk cId="3958871025" sldId="257"/>
+        </pc:sldMkLst>
+        <pc:picChg chg="mod">
+          <ac:chgData name="Israel Trejo" userId="94abe8331a44785d" providerId="LiveId" clId="{C64EC362-DB82-4CB5-B399-A3CE20D8262C}" dt="2025-10-21T05:43:18.584" v="1" actId="14100"/>
+          <ac:picMkLst>
+            <pc:docMk/>
+            <pc:sldMk cId="3958871025" sldId="257"/>
+            <ac:picMk id="5" creationId="{C1CB087F-0C0E-A41D-1AA5-4B83882BD1C0}"/>
+          </ac:picMkLst>
+        </pc:picChg>
+      </pc:sldChg>
+      <pc:sldChg chg="modSp mod">
+        <pc:chgData name="Israel Trejo" userId="94abe8331a44785d" providerId="LiveId" clId="{C64EC362-DB82-4CB5-B399-A3CE20D8262C}" dt="2025-10-21T15:39:12.203" v="16" actId="1076"/>
+        <pc:sldMkLst>
+          <pc:docMk/>
+          <pc:sldMk cId="3151779432" sldId="278"/>
+        </pc:sldMkLst>
+        <pc:spChg chg="mod">
+          <ac:chgData name="Israel Trejo" userId="94abe8331a44785d" providerId="LiveId" clId="{C64EC362-DB82-4CB5-B399-A3CE20D8262C}" dt="2025-10-21T15:11:58.332" v="3" actId="14100"/>
+          <ac:spMkLst>
+            <pc:docMk/>
+            <pc:sldMk cId="3151779432" sldId="278"/>
+            <ac:spMk id="44" creationId="{DF8DF3AF-B758-E12F-4CE0-E33D8C824DE4}"/>
+          </ac:spMkLst>
+        </pc:spChg>
+        <pc:spChg chg="mod ord">
+          <ac:chgData name="Israel Trejo" userId="94abe8331a44785d" providerId="LiveId" clId="{C64EC362-DB82-4CB5-B399-A3CE20D8262C}" dt="2025-10-21T15:39:12.203" v="16" actId="1076"/>
+          <ac:spMkLst>
+            <pc:docMk/>
+            <pc:sldMk cId="3151779432" sldId="278"/>
+            <ac:spMk id="89" creationId="{33DE37FA-0FBC-BCF5-75E7-602F46E8D4A9}"/>
+          </ac:spMkLst>
+        </pc:spChg>
+        <pc:spChg chg="mod">
+          <ac:chgData name="Israel Trejo" userId="94abe8331a44785d" providerId="LiveId" clId="{C64EC362-DB82-4CB5-B399-A3CE20D8262C}" dt="2025-10-21T15:38:22.347" v="5" actId="1076"/>
+          <ac:spMkLst>
+            <pc:docMk/>
+            <pc:sldMk cId="3151779432" sldId="278"/>
+            <ac:spMk id="90" creationId="{1B894CEB-3664-F666-92B7-4A02C894ADDB}"/>
+          </ac:spMkLst>
+        </pc:spChg>
+        <pc:spChg chg="mod">
+          <ac:chgData name="Israel Trejo" userId="94abe8331a44785d" providerId="LiveId" clId="{C64EC362-DB82-4CB5-B399-A3CE20D8262C}" dt="2025-10-21T15:39:02.840" v="14" actId="1076"/>
+          <ac:spMkLst>
+            <pc:docMk/>
+            <pc:sldMk cId="3151779432" sldId="278"/>
+            <ac:spMk id="96" creationId="{6208CC22-90F8-E5D2-C5B2-F4EBC285A0F1}"/>
+          </ac:spMkLst>
+        </pc:spChg>
+        <pc:spChg chg="mod">
+          <ac:chgData name="Israel Trejo" userId="94abe8331a44785d" providerId="LiveId" clId="{C64EC362-DB82-4CB5-B399-A3CE20D8262C}" dt="2025-10-21T15:39:08.636" v="15" actId="1076"/>
+          <ac:spMkLst>
+            <pc:docMk/>
+            <pc:sldMk cId="3151779432" sldId="278"/>
+            <ac:spMk id="99" creationId="{42993305-C8A6-2F3A-FF79-A77D25A9F6AE}"/>
+          </ac:spMkLst>
+        </pc:spChg>
+      </pc:sldChg>
+    </pc:docChg>
+  </pc:docChgLst>
 </pc:chgInfo>
 </file>
 
@@ -310,7 +381,7 @@
           <a:p>
             <a:fld id="{507F377F-E81C-404C-82FD-883D4ECAAF6D}" type="datetimeFigureOut">
               <a:rPr lang="en-US" smtClean="0"/>
-              <a:t>9/29/2025</a:t>
+              <a:t>10/21/2025</a:t>
             </a:fld>
             <a:endParaRPr lang="en-US"/>
           </a:p>
@@ -508,7 +579,7 @@
           <a:p>
             <a:fld id="{507F377F-E81C-404C-82FD-883D4ECAAF6D}" type="datetimeFigureOut">
               <a:rPr lang="en-US" smtClean="0"/>
-              <a:t>9/29/2025</a:t>
+              <a:t>10/21/2025</a:t>
             </a:fld>
             <a:endParaRPr lang="en-US"/>
           </a:p>
@@ -716,7 +787,7 @@
           <a:p>
             <a:fld id="{507F377F-E81C-404C-82FD-883D4ECAAF6D}" type="datetimeFigureOut">
               <a:rPr lang="en-US" smtClean="0"/>
-              <a:t>9/29/2025</a:t>
+              <a:t>10/21/2025</a:t>
             </a:fld>
             <a:endParaRPr lang="en-US"/>
           </a:p>
@@ -914,7 +985,7 @@
           <a:p>
             <a:fld id="{507F377F-E81C-404C-82FD-883D4ECAAF6D}" type="datetimeFigureOut">
               <a:rPr lang="en-US" smtClean="0"/>
-              <a:t>9/29/2025</a:t>
+              <a:t>10/21/2025</a:t>
             </a:fld>
             <a:endParaRPr lang="en-US"/>
           </a:p>
@@ -1189,7 +1260,7 @@
           <a:p>
             <a:fld id="{507F377F-E81C-404C-82FD-883D4ECAAF6D}" type="datetimeFigureOut">
               <a:rPr lang="en-US" smtClean="0"/>
-              <a:t>9/29/2025</a:t>
+              <a:t>10/21/2025</a:t>
             </a:fld>
             <a:endParaRPr lang="en-US"/>
           </a:p>
@@ -1454,7 +1525,7 @@
           <a:p>
             <a:fld id="{507F377F-E81C-404C-82FD-883D4ECAAF6D}" type="datetimeFigureOut">
               <a:rPr lang="en-US" smtClean="0"/>
-              <a:t>9/29/2025</a:t>
+              <a:t>10/21/2025</a:t>
             </a:fld>
             <a:endParaRPr lang="en-US"/>
           </a:p>
@@ -1866,7 +1937,7 @@
           <a:p>
             <a:fld id="{507F377F-E81C-404C-82FD-883D4ECAAF6D}" type="datetimeFigureOut">
               <a:rPr lang="en-US" smtClean="0"/>
-              <a:t>9/29/2025</a:t>
+              <a:t>10/21/2025</a:t>
             </a:fld>
             <a:endParaRPr lang="en-US"/>
           </a:p>
@@ -2007,7 +2078,7 @@
           <a:p>
             <a:fld id="{507F377F-E81C-404C-82FD-883D4ECAAF6D}" type="datetimeFigureOut">
               <a:rPr lang="en-US" smtClean="0"/>
-              <a:t>9/29/2025</a:t>
+              <a:t>10/21/2025</a:t>
             </a:fld>
             <a:endParaRPr lang="en-US"/>
           </a:p>
@@ -2120,7 +2191,7 @@
           <a:p>
             <a:fld id="{507F377F-E81C-404C-82FD-883D4ECAAF6D}" type="datetimeFigureOut">
               <a:rPr lang="en-US" smtClean="0"/>
-              <a:t>9/29/2025</a:t>
+              <a:t>10/21/2025</a:t>
             </a:fld>
             <a:endParaRPr lang="en-US"/>
           </a:p>
@@ -2431,7 +2502,7 @@
           <a:p>
             <a:fld id="{507F377F-E81C-404C-82FD-883D4ECAAF6D}" type="datetimeFigureOut">
               <a:rPr lang="en-US" smtClean="0"/>
-              <a:t>9/29/2025</a:t>
+              <a:t>10/21/2025</a:t>
             </a:fld>
             <a:endParaRPr lang="en-US"/>
           </a:p>
@@ -2719,7 +2790,7 @@
           <a:p>
             <a:fld id="{507F377F-E81C-404C-82FD-883D4ECAAF6D}" type="datetimeFigureOut">
               <a:rPr lang="en-US" smtClean="0"/>
-              <a:t>9/29/2025</a:t>
+              <a:t>10/21/2025</a:t>
             </a:fld>
             <a:endParaRPr lang="en-US"/>
           </a:p>
@@ -2960,7 +3031,7 @@
           <a:p>
             <a:fld id="{507F377F-E81C-404C-82FD-883D4ECAAF6D}" type="datetimeFigureOut">
               <a:rPr lang="en-US" smtClean="0"/>
-              <a:t>9/29/2025</a:t>
+              <a:t>10/21/2025</a:t>
             </a:fld>
             <a:endParaRPr lang="en-US"/>
           </a:p>
@@ -9632,8 +9703,8 @@
           </a:p>
         </p:txBody>
       </p:sp>
-      <mc:AlternateContent xmlns:mc="http://schemas.openxmlformats.org/markup-compatibility/2006">
-        <mc:Choice xmlns:a14="http://schemas.microsoft.com/office/drawing/2010/main" Requires="a14">
+      <mc:AlternateContent xmlns:mc="http://schemas.openxmlformats.org/markup-compatibility/2006" xmlns:a14="http://schemas.microsoft.com/office/drawing/2010/main">
+        <mc:Choice Requires="a14">
           <p:sp>
             <p:nvSpPr>
               <p:cNvPr id="7" name="TextBox 6">
@@ -9662,6 +9733,7 @@
               </a:bodyPr>
               <a:lstStyle/>
               <a:p>
+                <a:pPr/>
                 <a14:m>
                   <m:oMathPara xmlns:m="http://schemas.openxmlformats.org/officeDocument/2006/math">
                     <m:oMathParaPr>
@@ -9683,7 +9755,7 @@
             </p:txBody>
           </p:sp>
         </mc:Choice>
-        <mc:Fallback>
+        <mc:Fallback xmlns="">
           <p:sp>
             <p:nvSpPr>
               <p:cNvPr id="7" name="TextBox 6">
@@ -10091,8 +10163,8 @@
           </a:p>
         </p:txBody>
       </p:sp>
-      <mc:AlternateContent xmlns:mc="http://schemas.openxmlformats.org/markup-compatibility/2006">
-        <mc:Choice xmlns:a14="http://schemas.microsoft.com/office/drawing/2010/main" Requires="a14">
+      <mc:AlternateContent xmlns:mc="http://schemas.openxmlformats.org/markup-compatibility/2006" xmlns:a14="http://schemas.microsoft.com/office/drawing/2010/main">
+        <mc:Choice Requires="a14">
           <p:sp>
             <p:nvSpPr>
               <p:cNvPr id="20" name="TextBox 19">
@@ -10143,7 +10215,7 @@
             </p:txBody>
           </p:sp>
         </mc:Choice>
-        <mc:Fallback>
+        <mc:Fallback xmlns="">
           <p:sp>
             <p:nvSpPr>
               <p:cNvPr id="20" name="TextBox 19">
@@ -10188,8 +10260,8 @@
           </p:sp>
         </mc:Fallback>
       </mc:AlternateContent>
-      <mc:AlternateContent xmlns:mc="http://schemas.openxmlformats.org/markup-compatibility/2006">
-        <mc:Choice xmlns:a14="http://schemas.microsoft.com/office/drawing/2010/main" Requires="a14">
+      <mc:AlternateContent xmlns:mc="http://schemas.openxmlformats.org/markup-compatibility/2006" xmlns:a14="http://schemas.microsoft.com/office/drawing/2010/main">
+        <mc:Choice Requires="a14">
           <p:sp>
             <p:nvSpPr>
               <p:cNvPr id="21" name="TextBox 20">
@@ -10240,7 +10312,7 @@
             </p:txBody>
           </p:sp>
         </mc:Choice>
-        <mc:Fallback>
+        <mc:Fallback xmlns="">
           <p:sp>
             <p:nvSpPr>
               <p:cNvPr id="21" name="TextBox 20">
@@ -11531,8 +11603,8 @@
           </a:p>
         </p:txBody>
       </p:sp>
-      <mc:AlternateContent xmlns:mc="http://schemas.openxmlformats.org/markup-compatibility/2006">
-        <mc:Choice xmlns:a14="http://schemas.microsoft.com/office/drawing/2010/main" Requires="a14">
+      <mc:AlternateContent xmlns:mc="http://schemas.openxmlformats.org/markup-compatibility/2006" xmlns:a14="http://schemas.microsoft.com/office/drawing/2010/main">
+        <mc:Choice Requires="a14">
           <p:sp>
             <p:nvSpPr>
               <p:cNvPr id="60" name="TextBox 59">
@@ -11583,7 +11655,7 @@
             </p:txBody>
           </p:sp>
         </mc:Choice>
-        <mc:Fallback>
+        <mc:Fallback xmlns="">
           <p:sp>
             <p:nvSpPr>
               <p:cNvPr id="60" name="TextBox 59">
@@ -12437,10 +12509,10 @@
       </p:sp>
       <p:sp>
         <p:nvSpPr>
-          <p:cNvPr id="89" name="TextBox 88">
-            <a:extLst>
-              <a:ext uri="{FF2B5EF4-FFF2-40B4-BE49-F238E27FC236}">
-                <a16:creationId xmlns:a16="http://schemas.microsoft.com/office/drawing/2014/main" id="{33DE37FA-0FBC-BCF5-75E7-602F46E8D4A9}"/>
+          <p:cNvPr id="90" name="TextBox 89">
+            <a:extLst>
+              <a:ext uri="{FF2B5EF4-FFF2-40B4-BE49-F238E27FC236}">
+                <a16:creationId xmlns:a16="http://schemas.microsoft.com/office/drawing/2014/main" id="{1B894CEB-3664-F666-92B7-4A02C894ADDB}"/>
               </a:ext>
             </a:extLst>
           </p:cNvPr>
@@ -12449,8 +12521,8 @@
         </p:nvSpPr>
         <p:spPr>
           <a:xfrm>
-            <a:off x="5736162" y="5893154"/>
-            <a:ext cx="2975495" cy="646331"/>
+            <a:off x="2742010" y="5782239"/>
+            <a:ext cx="2584362" cy="646331"/>
           </a:xfrm>
           <a:prstGeom prst="rect">
             <a:avLst/>
@@ -12470,52 +12542,6 @@
           <a:p>
             <a:r>
               <a:rPr lang="en-US" dirty="0"/>
-              <a:t>(0x0.94+0x1.631-0.32=-0.32</a:t>
-            </a:r>
-          </a:p>
-          <a:p>
-            <a:r>
-              <a:rPr lang="en-US" dirty="0"/>
-              <a:t>Tanh(-0.32) = -0.3106</a:t>
-            </a:r>
-          </a:p>
-        </p:txBody>
-      </p:sp>
-      <p:sp>
-        <p:nvSpPr>
-          <p:cNvPr id="90" name="TextBox 89">
-            <a:extLst>
-              <a:ext uri="{FF2B5EF4-FFF2-40B4-BE49-F238E27FC236}">
-                <a16:creationId xmlns:a16="http://schemas.microsoft.com/office/drawing/2014/main" id="{1B894CEB-3664-F666-92B7-4A02C894ADDB}"/>
-              </a:ext>
-            </a:extLst>
-          </p:cNvPr>
-          <p:cNvSpPr txBox="1"/>
-          <p:nvPr/>
-        </p:nvSpPr>
-        <p:spPr>
-          <a:xfrm>
-            <a:off x="3138458" y="5909603"/>
-            <a:ext cx="2584362" cy="646331"/>
-          </a:xfrm>
-          <a:prstGeom prst="rect">
-            <a:avLst/>
-          </a:prstGeom>
-          <a:solidFill>
-            <a:schemeClr val="accent2">
-              <a:lumMod val="20000"/>
-              <a:lumOff val="80000"/>
-            </a:schemeClr>
-          </a:solidFill>
-        </p:spPr>
-        <p:txBody>
-          <a:bodyPr wrap="none" rtlCol="0">
-            <a:spAutoFit/>
-          </a:bodyPr>
-          <a:lstStyle/>
-          <a:p>
-            <a:r>
-              <a:rPr lang="en-US" dirty="0"/>
               <a:t>(0x1.65+0x2+0.62=-0.62</a:t>
             </a:r>
           </a:p>
@@ -12581,7 +12607,7 @@
         </p:nvSpPr>
         <p:spPr>
           <a:xfrm>
-            <a:off x="9952264" y="5922902"/>
+            <a:off x="10136373" y="5721102"/>
             <a:ext cx="2055627" cy="369332"/>
           </a:xfrm>
           <a:prstGeom prst="rect">
@@ -12680,7 +12706,7 @@
         </p:nvSpPr>
         <p:spPr>
           <a:xfrm>
-            <a:off x="7360276" y="5882246"/>
+            <a:off x="8175939" y="6105404"/>
             <a:ext cx="2971454" cy="646331"/>
           </a:xfrm>
           <a:prstGeom prst="rect">
@@ -12812,6 +12838,52 @@
                 </a:solidFill>
               </a:rPr>
               <a:t>0.64</a:t>
+            </a:r>
+          </a:p>
+        </p:txBody>
+      </p:sp>
+      <p:sp>
+        <p:nvSpPr>
+          <p:cNvPr id="89" name="TextBox 88">
+            <a:extLst>
+              <a:ext uri="{FF2B5EF4-FFF2-40B4-BE49-F238E27FC236}">
+                <a16:creationId xmlns:a16="http://schemas.microsoft.com/office/drawing/2014/main" id="{33DE37FA-0FBC-BCF5-75E7-602F46E8D4A9}"/>
+              </a:ext>
+            </a:extLst>
+          </p:cNvPr>
+          <p:cNvSpPr txBox="1"/>
+          <p:nvPr/>
+        </p:nvSpPr>
+        <p:spPr>
+          <a:xfrm>
+            <a:off x="5174812" y="6089408"/>
+            <a:ext cx="2975495" cy="646331"/>
+          </a:xfrm>
+          <a:prstGeom prst="rect">
+            <a:avLst/>
+          </a:prstGeom>
+          <a:solidFill>
+            <a:schemeClr val="accent2">
+              <a:lumMod val="20000"/>
+              <a:lumOff val="80000"/>
+            </a:schemeClr>
+          </a:solidFill>
+        </p:spPr>
+        <p:txBody>
+          <a:bodyPr wrap="none" rtlCol="0">
+            <a:spAutoFit/>
+          </a:bodyPr>
+          <a:lstStyle/>
+          <a:p>
+            <a:r>
+              <a:rPr lang="en-US" dirty="0"/>
+              <a:t>(0x0.94+0x1.631-0.32=-0.32</a:t>
+            </a:r>
+          </a:p>
+          <a:p>
+            <a:r>
+              <a:rPr lang="en-US" dirty="0"/>
+              <a:t>Tanh(-0.32) = -0.3106</a:t>
             </a:r>
           </a:p>
         </p:txBody>
@@ -13891,15 +13963,15 @@
       <p:bldP spid="64" grpId="0" animBg="1"/>
       <p:bldP spid="65" grpId="0" animBg="1"/>
       <p:bldP spid="66" grpId="0" animBg="1"/>
-      <p:bldP spid="86" grpId="0"/>
-      <p:bldP spid="89" grpId="0"/>
-      <p:bldP spid="90" grpId="0"/>
+      <p:bldP spid="86" grpId="0" animBg="1"/>
+      <p:bldP spid="90" grpId="0" animBg="1"/>
       <p:bldP spid="95" grpId="0"/>
-      <p:bldP spid="96" grpId="0"/>
+      <p:bldP spid="96" grpId="0" animBg="1"/>
       <p:bldP spid="97" grpId="0" animBg="1"/>
       <p:bldP spid="99" grpId="0" animBg="1"/>
       <p:bldP spid="100" grpId="0" animBg="1"/>
       <p:bldP spid="101" grpId="0" animBg="1"/>
+      <p:bldP spid="89" grpId="0" animBg="1"/>
     </p:bldLst>
   </p:timing>
 </p:sld>
@@ -16603,8 +16675,8 @@
         </p:blipFill>
         <p:spPr>
           <a:xfrm>
-            <a:off x="941560" y="139537"/>
-            <a:ext cx="4692619" cy="5215257"/>
+            <a:off x="0" y="177637"/>
+            <a:ext cx="5937505" cy="6598792"/>
           </a:xfrm>
           <a:prstGeom prst="rect">
             <a:avLst/>
@@ -16861,8 +16933,8 @@
           </a:p>
         </p:txBody>
       </p:sp>
-      <mc:AlternateContent xmlns:mc="http://schemas.openxmlformats.org/markup-compatibility/2006">
-        <mc:Choice xmlns:a14="http://schemas.microsoft.com/office/drawing/2010/main" Requires="a14">
+      <mc:AlternateContent xmlns:mc="http://schemas.openxmlformats.org/markup-compatibility/2006" xmlns:a14="http://schemas.microsoft.com/office/drawing/2010/main">
+        <mc:Choice Requires="a14">
           <p:sp>
             <p:nvSpPr>
               <p:cNvPr id="2" name="Title 1">
@@ -16973,7 +17045,7 @@
             </p:txBody>
           </p:sp>
         </mc:Choice>
-        <mc:Fallback>
+        <mc:Fallback xmlns="">
           <p:sp>
             <p:nvSpPr>
               <p:cNvPr id="2" name="Title 1">
@@ -18086,15 +18158,6 @@
 </file>
 
 <file path=customXml/item1.xml><?xml version="1.0" encoding="utf-8"?>
-<?mso-contentType ?>
-<FormTemplates xmlns="http://schemas.microsoft.com/sharepoint/v3/contenttype/forms">
-  <Display>DocumentLibraryForm</Display>
-  <Edit>DocumentLibraryForm</Edit>
-  <New>DocumentLibraryForm</New>
-</FormTemplates>
-</file>
-
-<file path=customXml/item2.xml><?xml version="1.0" encoding="utf-8"?>
 <ct:contentTypeSchema xmlns:ct="http://schemas.microsoft.com/office/2006/metadata/contentType" xmlns:ma="http://schemas.microsoft.com/office/2006/metadata/properties/metaAttributes" ct:_="" ma:_="" ma:contentTypeName="Document" ma:contentTypeID="0x01010083CAA7BDD6E90148B0AE2A8FEC8E0875" ma:contentTypeVersion="17" ma:contentTypeDescription="Create a new document." ma:contentTypeScope="" ma:versionID="8d92cc494622425f2dddc510ee11f906">
   <xsd:schema xmlns:xsd="http://www.w3.org/2001/XMLSchema" xmlns:xs="http://www.w3.org/2001/XMLSchema" xmlns:p="http://schemas.microsoft.com/office/2006/metadata/properties" xmlns:ns3="c3f03550-a4c2-468a-bdc1-cbe2f2088984" xmlns:ns4="5b7eb3d6-8701-4225-88b7-bb1cfb4febda" targetNamespace="http://schemas.microsoft.com/office/2006/metadata/properties" ma:root="true" ma:fieldsID="ac786f04cc7211612565f094c16994fa" ns3:_="" ns4:_="">
     <xsd:import namespace="c3f03550-a4c2-468a-bdc1-cbe2f2088984"/>
@@ -18341,6 +18404,15 @@
 </ct:contentTypeSchema>
 </file>
 
+<file path=customXml/item2.xml><?xml version="1.0" encoding="utf-8"?>
+<?mso-contentType ?>
+<FormTemplates xmlns="http://schemas.microsoft.com/sharepoint/v3/contenttype/forms">
+  <Display>DocumentLibraryForm</Display>
+  <Edit>DocumentLibraryForm</Edit>
+  <New>DocumentLibraryForm</New>
+</FormTemplates>
+</file>
+
 <file path=customXml/item3.xml><?xml version="1.0" encoding="utf-8"?>
 <p:properties xmlns:p="http://schemas.microsoft.com/office/2006/metadata/properties" xmlns:xsi="http://www.w3.org/2001/XMLSchema-instance" xmlns:pc="http://schemas.microsoft.com/office/infopath/2007/PartnerControls">
   <documentManagement>
@@ -18350,14 +18422,6 @@
 </file>
 
 <file path=customXml/itemProps1.xml><?xml version="1.0" encoding="utf-8"?>
-<ds:datastoreItem xmlns:ds="http://schemas.openxmlformats.org/officeDocument/2006/customXml" ds:itemID="{BC7C9FC8-48D6-4AA0-B76D-737B490F87D5}">
-  <ds:schemaRefs>
-    <ds:schemaRef ds:uri="http://schemas.microsoft.com/sharepoint/v3/contenttype/forms"/>
-  </ds:schemaRefs>
-</ds:datastoreItem>
-</file>
-
-<file path=customXml/itemProps2.xml><?xml version="1.0" encoding="utf-8"?>
 <ds:datastoreItem xmlns:ds="http://schemas.openxmlformats.org/officeDocument/2006/customXml" ds:itemID="{9EDDB58B-986C-4F33-BF6D-EDD13F885ED3}">
   <ds:schemaRefs>
     <ds:schemaRef ds:uri="http://schemas.microsoft.com/office/2006/metadata/contentType"/>
@@ -18372,6 +18436,14 @@
     <ds:schemaRef ds:uri="http://purl.org/dc/elements/1.1/"/>
     <ds:schemaRef ds:uri="http://purl.org/dc/terms/"/>
     <ds:schemaRef ds:uri="http://schemas.microsoft.com/internal/obd"/>
+  </ds:schemaRefs>
+</ds:datastoreItem>
+</file>
+
+<file path=customXml/itemProps2.xml><?xml version="1.0" encoding="utf-8"?>
+<ds:datastoreItem xmlns:ds="http://schemas.openxmlformats.org/officeDocument/2006/customXml" ds:itemID="{BC7C9FC8-48D6-4AA0-B76D-737B490F87D5}">
+  <ds:schemaRefs>
+    <ds:schemaRef ds:uri="http://schemas.microsoft.com/sharepoint/v3/contenttype/forms"/>
   </ds:schemaRefs>
 </ds:datastoreItem>
 </file>
